--- a/classes/parte-5-explotacion-de-sistemas-y-binarios/130-ingenieria-inversa-introduccion/clase-130-presentacion.pptx
+++ b/classes/parte-5-explotacion-de-sistemas-y-binarios/130-ingenieria-inversa-introduccion/clase-130-presentacion.pptx
@@ -17,6 +17,8 @@
     <p:sldId id="265" r:id="rId16"/>
     <p:sldId id="266" r:id="rId17"/>
     <p:sldId id="267" r:id="rId18"/>
+    <p:sldId id="268" r:id="rId19"/>
+    <p:sldId id="269" r:id="rId20"/>
   </p:sldIdLst>
   <p:sldSz cx="9144000" cy="6858000" type="screen4x3"/>
   <p:notesSz cx="6858000" cy="9144000"/>
@@ -3198,7 +3200,7 @@
                   <a:srgbClr val="0B3D2E"/>
                 </a:solidFill>
               </a:rPr>
-              <a:t>⚠️ Errores comunes</a:t>
+              <a:t>📝 Reto verificable</a:t>
             </a:r>
           </a:p>
         </p:txBody>
@@ -3236,67 +3238,52 @@
                   <a:srgbClr val="22282E"/>
                 </a:solidFill>
               </a:rPr>
-              <a:t>•  readelf -s no muestra nombres — Binario stripped; usa análisis por patrones</a:t>
-            </a:r>
-          </a:p>
-          <a:p>
-            <a:pPr>
-              <a:spcAft>
-                <a:spcPts val="600"/>
-              </a:spcAft>
-            </a:pPr>
-            <a:r>
-              <a:rPr sz="1500">
-                <a:solidFill>
-                  <a:srgbClr val="22282E"/>
-                </a:solidFill>
-              </a:rPr>
-              <a:t>•  strings no revela nada útil — Cadenas cifradas/ofuscadas; pasa a dinámico</a:t>
-            </a:r>
-          </a:p>
-          <a:p>
-            <a:pPr>
-              <a:spcAft>
-                <a:spcPts val="600"/>
-              </a:spcAft>
-            </a:pPr>
-            <a:r>
-              <a:rPr sz="1500">
-                <a:solidFill>
-                  <a:srgbClr val="22282E"/>
-                </a:solidFill>
-              </a:rPr>
-              <a:t>•  Confundir program vs section headers — Program = carga; section = análisis</a:t>
-            </a:r>
-          </a:p>
-          <a:p>
-            <a:pPr>
-              <a:spcAft>
-                <a:spcPts val="600"/>
-              </a:spcAft>
-            </a:pPr>
-            <a:r>
-              <a:rPr sz="1500">
-                <a:solidFill>
-                  <a:srgbClr val="22282E"/>
-                </a:solidFill>
-              </a:rPr>
-              <a:t>•  objdump da AT&amp;T — Añade -M intel</a:t>
-            </a:r>
-          </a:p>
-          <a:p>
-            <a:pPr>
-              <a:spcAft>
-                <a:spcPts val="600"/>
-              </a:spcAft>
-            </a:pPr>
-            <a:r>
-              <a:rPr sz="1500">
-                <a:solidFill>
-                  <a:srgbClr val="22282E"/>
-                </a:solidFill>
-              </a:rPr>
-              <a:t>•  Analizar un PE con herramientas ELF — Usa pev/readpe para PE</a:t>
+              <a:t>•  Realiza el triage estático completo de un crackme e identifica, sin ejecutarlo, cuál es la función</a:t>
+            </a:r>
+          </a:p>
+          <a:p>
+            <a:pPr>
+              <a:spcAft>
+                <a:spcPts val="600"/>
+              </a:spcAft>
+            </a:pPr>
+            <a:r>
+              <a:rPr sz="1500">
+                <a:solidFill>
+                  <a:srgbClr val="22282E"/>
+                </a:solidFill>
+              </a:rPr>
+              <a:t>•  que compara la clave y qué API/rutina usa.</a:t>
+            </a:r>
+          </a:p>
+          <a:p>
+            <a:pPr>
+              <a:spcAft>
+                <a:spcPts val="600"/>
+              </a:spcAft>
+            </a:pPr>
+            <a:r>
+              <a:rPr sz="1500">
+                <a:solidFill>
+                  <a:srgbClr val="22282E"/>
+                </a:solidFill>
+              </a:rPr>
+              <a:t>•  Criterio de aceptación: señalas la función de comparación (p. ej. strcmp/lógica propia) y</a:t>
+            </a:r>
+          </a:p>
+          <a:p>
+            <a:pPr>
+              <a:spcAft>
+                <a:spcPts val="600"/>
+              </a:spcAft>
+            </a:pPr>
+            <a:r>
+              <a:rPr sz="1500">
+                <a:solidFill>
+                  <a:srgbClr val="22282E"/>
+                </a:solidFill>
+              </a:rPr>
+              <a:t>•  justificas tu conclusión con evidencia de strings/objdump/readelf.</a:t>
             </a:r>
           </a:p>
         </p:txBody>
@@ -3347,7 +3334,7 @@
                   <a:srgbClr val="0B3D2E"/>
                 </a:solidFill>
               </a:rPr>
-              <a:t>❓ Preguntas frecuentes</a:t>
+              <a:t>⚠️ Errores comunes</a:t>
             </a:r>
           </a:p>
         </p:txBody>
@@ -3385,82 +3372,67 @@
                   <a:srgbClr val="22282E"/>
                 </a:solidFill>
               </a:rPr>
-              <a:t>•  ❓ ¿Reversing es legal? El análisis con fines de seguridad, interoperabilidad y sobre binarios</a:t>
-            </a:r>
-          </a:p>
-          <a:p>
-            <a:pPr>
-              <a:spcAft>
-                <a:spcPts val="600"/>
-              </a:spcAft>
-            </a:pPr>
-            <a:r>
-              <a:rPr sz="1500">
-                <a:solidFill>
-                  <a:srgbClr val="22282E"/>
-                </a:solidFill>
-              </a:rPr>
-              <a:t>•  propios/autorizados es legítimo; respeta licencias y jurisdicción.</a:t>
-            </a:r>
-          </a:p>
-          <a:p>
-            <a:pPr>
-              <a:spcAft>
-                <a:spcPts val="600"/>
-              </a:spcAft>
-            </a:pPr>
-            <a:r>
-              <a:rPr sz="1500">
-                <a:solidFill>
-                  <a:srgbClr val="22282E"/>
-                </a:solidFill>
-              </a:rPr>
-              <a:t>•  ❓ ¿Empiezo por estático o dinámico? Casi siempre triage estático primero; el dinámico confirma y</a:t>
-            </a:r>
-          </a:p>
-          <a:p>
-            <a:pPr>
-              <a:spcAft>
-                <a:spcPts val="600"/>
-              </a:spcAft>
-            </a:pPr>
-            <a:r>
-              <a:rPr sz="1500">
-                <a:solidFill>
-                  <a:srgbClr val="22282E"/>
-                </a:solidFill>
-              </a:rPr>
-              <a:t>•  desvela lo ofuscado.</a:t>
-            </a:r>
-          </a:p>
-          <a:p>
-            <a:pPr>
-              <a:spcAft>
-                <a:spcPts val="600"/>
-              </a:spcAft>
-            </a:pPr>
-            <a:r>
-              <a:rPr sz="1500">
-                <a:solidFill>
-                  <a:srgbClr val="22282E"/>
-                </a:solidFill>
-              </a:rPr>
-              <a:t>•  ❓ ¿Necesito los símbolos? Ayudan mucho, pero el reversing serio asume binarios stripped y</a:t>
-            </a:r>
-          </a:p>
-          <a:p>
-            <a:pPr>
-              <a:spcAft>
-                <a:spcPts val="600"/>
-              </a:spcAft>
-            </a:pPr>
-            <a:r>
-              <a:rPr sz="1500">
-                <a:solidFill>
-                  <a:srgbClr val="22282E"/>
-                </a:solidFill>
-              </a:rPr>
-              <a:t>•  reconstruye la semántica.</a:t>
+              <a:t>•  readelf -s no muestra nombres — Binario stripped; usa análisis por patrones</a:t>
+            </a:r>
+          </a:p>
+          <a:p>
+            <a:pPr>
+              <a:spcAft>
+                <a:spcPts val="600"/>
+              </a:spcAft>
+            </a:pPr>
+            <a:r>
+              <a:rPr sz="1500">
+                <a:solidFill>
+                  <a:srgbClr val="22282E"/>
+                </a:solidFill>
+              </a:rPr>
+              <a:t>•  strings no revela nada útil — Cadenas cifradas/ofuscadas; pasa a dinámico</a:t>
+            </a:r>
+          </a:p>
+          <a:p>
+            <a:pPr>
+              <a:spcAft>
+                <a:spcPts val="600"/>
+              </a:spcAft>
+            </a:pPr>
+            <a:r>
+              <a:rPr sz="1500">
+                <a:solidFill>
+                  <a:srgbClr val="22282E"/>
+                </a:solidFill>
+              </a:rPr>
+              <a:t>•  Confundir program vs section headers — Program = carga; section = análisis</a:t>
+            </a:r>
+          </a:p>
+          <a:p>
+            <a:pPr>
+              <a:spcAft>
+                <a:spcPts val="600"/>
+              </a:spcAft>
+            </a:pPr>
+            <a:r>
+              <a:rPr sz="1500">
+                <a:solidFill>
+                  <a:srgbClr val="22282E"/>
+                </a:solidFill>
+              </a:rPr>
+              <a:t>•  objdump da AT&amp;T — Añade -M intel</a:t>
+            </a:r>
+          </a:p>
+          <a:p>
+            <a:pPr>
+              <a:spcAft>
+                <a:spcPts val="600"/>
+              </a:spcAft>
+            </a:pPr>
+            <a:r>
+              <a:rPr sz="1500">
+                <a:solidFill>
+                  <a:srgbClr val="22282E"/>
+                </a:solidFill>
+              </a:rPr>
+              <a:t>•  Analizar un PE con herramientas ELF — Usa pev/readpe para PE</a:t>
             </a:r>
           </a:p>
         </p:txBody>
@@ -3511,7 +3483,7 @@
                   <a:srgbClr val="0B3D2E"/>
                 </a:solidFill>
               </a:rPr>
-              <a:t>🔗 Referencias</a:t>
+              <a:t>❓ Preguntas frecuentes</a:t>
             </a:r>
           </a:p>
         </p:txBody>
@@ -3549,6 +3521,170 @@
                   <a:srgbClr val="22282E"/>
                 </a:solidFill>
               </a:rPr>
+              <a:t>•  ❓ ¿Reversing es legal? El análisis con fines de seguridad, interoperabilidad y sobre binarios</a:t>
+            </a:r>
+          </a:p>
+          <a:p>
+            <a:pPr>
+              <a:spcAft>
+                <a:spcPts val="600"/>
+              </a:spcAft>
+            </a:pPr>
+            <a:r>
+              <a:rPr sz="1500">
+                <a:solidFill>
+                  <a:srgbClr val="22282E"/>
+                </a:solidFill>
+              </a:rPr>
+              <a:t>•  propios/autorizados es legítimo; respeta licencias y jurisdicción.</a:t>
+            </a:r>
+          </a:p>
+          <a:p>
+            <a:pPr>
+              <a:spcAft>
+                <a:spcPts val="600"/>
+              </a:spcAft>
+            </a:pPr>
+            <a:r>
+              <a:rPr sz="1500">
+                <a:solidFill>
+                  <a:srgbClr val="22282E"/>
+                </a:solidFill>
+              </a:rPr>
+              <a:t>•  ❓ ¿Empiezo por estático o dinámico? Casi siempre triage estático primero; el dinámico confirma y</a:t>
+            </a:r>
+          </a:p>
+          <a:p>
+            <a:pPr>
+              <a:spcAft>
+                <a:spcPts val="600"/>
+              </a:spcAft>
+            </a:pPr>
+            <a:r>
+              <a:rPr sz="1500">
+                <a:solidFill>
+                  <a:srgbClr val="22282E"/>
+                </a:solidFill>
+              </a:rPr>
+              <a:t>•  desvela lo ofuscado.</a:t>
+            </a:r>
+          </a:p>
+          <a:p>
+            <a:pPr>
+              <a:spcAft>
+                <a:spcPts val="600"/>
+              </a:spcAft>
+            </a:pPr>
+            <a:r>
+              <a:rPr sz="1500">
+                <a:solidFill>
+                  <a:srgbClr val="22282E"/>
+                </a:solidFill>
+              </a:rPr>
+              <a:t>•  ❓ ¿Necesito los símbolos? Ayudan mucho, pero el reversing serio asume binarios stripped y</a:t>
+            </a:r>
+          </a:p>
+          <a:p>
+            <a:pPr>
+              <a:spcAft>
+                <a:spcPts val="600"/>
+              </a:spcAft>
+            </a:pPr>
+            <a:r>
+              <a:rPr sz="1500">
+                <a:solidFill>
+                  <a:srgbClr val="22282E"/>
+                </a:solidFill>
+              </a:rPr>
+              <a:t>•  reconstruye la semántica.</a:t>
+            </a:r>
+          </a:p>
+        </p:txBody>
+      </p:sp>
+    </p:spTree>
+  </p:cSld>
+  <p:clrMapOvr>
+    <a:masterClrMapping/>
+  </p:clrMapOvr>
+</p:sld>
+</file>
+
+<file path=ppt/slides/slide13.xml><?xml version="1.0" encoding="utf-8"?>
+<p:sld xmlns:a="http://schemas.openxmlformats.org/drawingml/2006/main" xmlns:p="http://schemas.openxmlformats.org/presentationml/2006/main" xmlns:r="http://schemas.openxmlformats.org/officeDocument/2006/relationships">
+  <p:cSld>
+    <p:spTree>
+      <p:nvGrpSpPr>
+        <p:cNvPr id="1" name=""/>
+        <p:cNvGrpSpPr/>
+        <p:nvPr/>
+      </p:nvGrpSpPr>
+      <p:grpSpPr/>
+      <p:sp>
+        <p:nvSpPr>
+          <p:cNvPr id="2" name="TextBox 1"/>
+          <p:cNvSpPr txBox="1"/>
+          <p:nvPr/>
+        </p:nvSpPr>
+        <p:spPr>
+          <a:xfrm>
+            <a:off x="457200" y="320040"/>
+            <a:ext cx="8229600" cy="822960"/>
+          </a:xfrm>
+          <a:prstGeom prst="rect">
+            <a:avLst/>
+          </a:prstGeom>
+          <a:noFill/>
+        </p:spPr>
+        <p:txBody>
+          <a:bodyPr wrap="square">
+            <a:spAutoFit/>
+          </a:bodyPr>
+          <a:lstStyle/>
+          <a:p>
+            <a:r>
+              <a:rPr sz="2600" b="1">
+                <a:solidFill>
+                  <a:srgbClr val="0B3D2E"/>
+                </a:solidFill>
+              </a:rPr>
+              <a:t>🔗 Referencias</a:t>
+            </a:r>
+          </a:p>
+        </p:txBody>
+      </p:sp>
+      <p:sp>
+        <p:nvSpPr>
+          <p:cNvPr id="3" name="TextBox 2"/>
+          <p:cNvSpPr txBox="1"/>
+          <p:nvPr/>
+        </p:nvSpPr>
+        <p:spPr>
+          <a:xfrm>
+            <a:off x="457200" y="1280160"/>
+            <a:ext cx="8229600" cy="4937760"/>
+          </a:xfrm>
+          <a:prstGeom prst="rect">
+            <a:avLst/>
+          </a:prstGeom>
+          <a:noFill/>
+        </p:spPr>
+        <p:txBody>
+          <a:bodyPr wrap="square">
+            <a:spAutoFit/>
+          </a:bodyPr>
+          <a:lstStyle/>
+          <a:p>
+            <a:pPr>
+              <a:spcAft>
+                <a:spcPts val="600"/>
+              </a:spcAft>
+            </a:pPr>
+            <a:r>
+              <a:rPr sz="1500">
+                <a:solidFill>
+                  <a:srgbClr val="22282E"/>
+                </a:solidFill>
+              </a:rPr>
               <a:t>•  Andriesse, D. Practical Binary Analysis, caps. 1-2. No Starch Press.</a:t>
             </a:r>
           </a:p>
@@ -3599,6 +3735,81 @@
           </a:p>
         </p:txBody>
       </p:sp>
+    </p:spTree>
+  </p:cSld>
+  <p:clrMapOvr>
+    <a:masterClrMapping/>
+  </p:clrMapOvr>
+</p:sld>
+</file>
+
+<file path=ppt/slides/slide14.xml><?xml version="1.0" encoding="utf-8"?>
+<p:sld xmlns:a="http://schemas.openxmlformats.org/drawingml/2006/main" xmlns:p="http://schemas.openxmlformats.org/presentationml/2006/main" xmlns:r="http://schemas.openxmlformats.org/officeDocument/2006/relationships">
+  <p:cSld>
+    <p:spTree>
+      <p:nvGrpSpPr>
+        <p:cNvPr id="1" name=""/>
+        <p:cNvGrpSpPr/>
+        <p:nvPr/>
+      </p:nvGrpSpPr>
+      <p:grpSpPr/>
+      <p:sp>
+        <p:nvSpPr>
+          <p:cNvPr id="2" name="TextBox 1"/>
+          <p:cNvSpPr txBox="1"/>
+          <p:nvPr/>
+        </p:nvSpPr>
+        <p:spPr>
+          <a:xfrm>
+            <a:off x="457200" y="274320"/>
+            <a:ext cx="8229600" cy="640080"/>
+          </a:xfrm>
+          <a:prstGeom prst="rect">
+            <a:avLst/>
+          </a:prstGeom>
+          <a:noFill/>
+        </p:spPr>
+        <p:txBody>
+          <a:bodyPr wrap="square">
+            <a:spAutoFit/>
+          </a:bodyPr>
+          <a:lstStyle/>
+          <a:p>
+            <a:r>
+              <a:rPr sz="2200" b="1">
+                <a:solidFill>
+                  <a:srgbClr val="0B3D2E"/>
+                </a:solidFill>
+              </a:rPr>
+              <a:t>Diagrama de la clase</a:t>
+            </a:r>
+          </a:p>
+        </p:txBody>
+      </p:sp>
+      <p:pic>
+        <p:nvPicPr>
+          <p:cNvPr id="3" name="Picture 2" descr="8cba957dd4b3ca03.png"/>
+          <p:cNvPicPr>
+            <a:picLocks noChangeAspect="1"/>
+          </p:cNvPicPr>
+          <p:nvPr/>
+        </p:nvPicPr>
+        <p:blipFill>
+          <a:blip r:embed="rId2"/>
+          <a:stretch>
+            <a:fillRect/>
+          </a:stretch>
+        </p:blipFill>
+        <p:spPr>
+          <a:xfrm>
+            <a:off x="457200" y="1467612"/>
+            <a:ext cx="8229600" cy="4562856"/>
+          </a:xfrm>
+          <a:prstGeom prst="rect">
+            <a:avLst/>
+          </a:prstGeom>
+        </p:spPr>
+      </p:pic>
     </p:spTree>
   </p:cSld>
   <p:clrMapOvr>
@@ -4122,7 +4333,7 @@
                   <a:srgbClr val="0B3D2E"/>
                 </a:solidFill>
               </a:rPr>
-              <a:t>📖 Definiciones y características</a:t>
+              <a:t>🧠 Explicación en profundidad</a:t>
             </a:r>
           </a:p>
         </p:txBody>
@@ -4160,97 +4371,97 @@
                   <a:srgbClr val="22282E"/>
                 </a:solidFill>
               </a:rPr>
-              <a:t>•  Ingeniería inversa: proceso de deducir el funcionamiento de un programa a partir de su forma</a:t>
-            </a:r>
-          </a:p>
-          <a:p>
-            <a:pPr>
-              <a:spcAft>
-                <a:spcPts val="600"/>
-              </a:spcAft>
-            </a:pPr>
-            <a:r>
-              <a:rPr sz="1500">
-                <a:solidFill>
-                  <a:srgbClr val="22282E"/>
-                </a:solidFill>
-              </a:rPr>
-              <a:t>•  compilada. Clave: legal y valiosa en seguridad defensiva y ofensiva autorizada.</a:t>
-            </a:r>
-          </a:p>
-          <a:p>
-            <a:pPr>
-              <a:spcAft>
-                <a:spcPts val="600"/>
-              </a:spcAft>
-            </a:pPr>
-            <a:r>
-              <a:rPr sz="1500">
-                <a:solidFill>
-                  <a:srgbClr val="22282E"/>
-                </a:solidFill>
-              </a:rPr>
-              <a:t>•  ELF: formato ejecutable de Linux con cabecera, program headers (carga) y section headers</a:t>
-            </a:r>
-          </a:p>
-          <a:p>
-            <a:pPr>
-              <a:spcAft>
-                <a:spcPts val="600"/>
-              </a:spcAft>
-            </a:pPr>
-            <a:r>
-              <a:rPr sz="1500">
-                <a:solidFill>
-                  <a:srgbClr val="22282E"/>
-                </a:solidFill>
-              </a:rPr>
-              <a:t>•  (análisis). Clave: readelf -h muestra tipo, arquitectura y entry point.</a:t>
-            </a:r>
-          </a:p>
-          <a:p>
-            <a:pPr>
-              <a:spcAft>
-                <a:spcPts val="600"/>
-              </a:spcAft>
-            </a:pPr>
-            <a:r>
-              <a:rPr sz="1500">
-                <a:solidFill>
-                  <a:srgbClr val="22282E"/>
-                </a:solidFill>
-              </a:rPr>
-              <a:t>•  PE: formato de Windows (DOS header, PE header, secciones, tabla de importaciones). Clave: las</a:t>
-            </a:r>
-          </a:p>
-          <a:p>
-            <a:pPr>
-              <a:spcAft>
-                <a:spcPts val="600"/>
-              </a:spcAft>
-            </a:pPr>
-            <a:r>
-              <a:rPr sz="1500">
-                <a:solidFill>
-                  <a:srgbClr val="22282E"/>
-                </a:solidFill>
-              </a:rPr>
-              <a:t>•  imports revelan qué APIs usa (indicio de comportamiento).</a:t>
-            </a:r>
-          </a:p>
-          <a:p>
-            <a:pPr>
-              <a:spcAft>
-                <a:spcPts val="600"/>
-              </a:spcAft>
-            </a:pPr>
-            <a:r>
-              <a:rPr sz="1500">
-                <a:solidFill>
-                  <a:srgbClr val="22282E"/>
-                </a:solidFill>
-              </a:rPr>
-              <a:t>•  Binario stripped: sin símbolos de depuración/nombres. Clave: dificulta el análisis; hay que</a:t>
+              <a:t>•  La ingeniería inversa (RE) es el proceso de entender cómo funciona un programa a partir de su</a:t>
+            </a:r>
+          </a:p>
+          <a:p>
+            <a:pPr>
+              <a:spcAft>
+                <a:spcPts val="600"/>
+              </a:spcAft>
+            </a:pPr>
+            <a:r>
+              <a:rPr sz="1500">
+                <a:solidFill>
+                  <a:srgbClr val="22282E"/>
+                </a:solidFill>
+              </a:rPr>
+              <a:t>•  forma compilada, sin acceso al código fuente. Es la otra cara de la explotación: para escribir un</a:t>
+            </a:r>
+          </a:p>
+          <a:p>
+            <a:pPr>
+              <a:spcAft>
+                <a:spcPts val="600"/>
+              </a:spcAft>
+            </a:pPr>
+            <a:r>
+              <a:rPr sz="1500">
+                <a:solidFill>
+                  <a:srgbClr val="22282E"/>
+                </a:solidFill>
+              </a:rPr>
+              <a:t>•  exploit hay que comprender el binario objetivo, y para analizar malware (Parte 6) hay que reconstruir</a:t>
+            </a:r>
+          </a:p>
+          <a:p>
+            <a:pPr>
+              <a:spcAft>
+                <a:spcPts val="600"/>
+              </a:spcAft>
+            </a:pPr>
+            <a:r>
+              <a:rPr sz="1500">
+                <a:solidFill>
+                  <a:srgbClr val="22282E"/>
+                </a:solidFill>
+              </a:rPr>
+              <a:t>•  su comportamiento desde sus bytes. Conviene desactivar de entrada la connotación ilícita: la RE tiene</a:t>
+            </a:r>
+          </a:p>
+          <a:p>
+            <a:pPr>
+              <a:spcAft>
+                <a:spcPts val="600"/>
+              </a:spcAft>
+            </a:pPr>
+            <a:r>
+              <a:rPr sz="1500">
+                <a:solidFill>
+                  <a:srgbClr val="22282E"/>
+                </a:solidFill>
+              </a:rPr>
+              <a:t>•  usos legítimos y esenciales —análisis de malware, investigación de vulnerabilidades,</a:t>
+            </a:r>
+          </a:p>
+          <a:p>
+            <a:pPr>
+              <a:spcAft>
+                <a:spcPts val="600"/>
+              </a:spcAft>
+            </a:pPr>
+            <a:r>
+              <a:rPr sz="1500">
+                <a:solidFill>
+                  <a:srgbClr val="22282E"/>
+                </a:solidFill>
+              </a:rPr>
+              <a:t>•  interoperabilidad, auditoría de software sin fuentes, análisis forense— y es una disciplina técnica</a:t>
+            </a:r>
+          </a:p>
+          <a:p>
+            <a:pPr>
+              <a:spcAft>
+                <a:spcPts val="600"/>
+              </a:spcAft>
+            </a:pPr>
+            <a:r>
+              <a:rPr sz="1500">
+                <a:solidFill>
+                  <a:srgbClr val="22282E"/>
+                </a:solidFill>
+              </a:rPr>
+              <a:t>•  neutra. El reto es intelectual: un compilador descarta información al traducir el código</a:t>
             </a:r>
           </a:p>
         </p:txBody>
@@ -4301,7 +4512,7 @@
                   <a:srgbClr val="0B3D2E"/>
                 </a:solidFill>
               </a:rPr>
-              <a:t>🧰 Herramientas y preparación</a:t>
+              <a:t>📖 Definiciones y características</a:t>
             </a:r>
           </a:p>
         </p:txBody>
@@ -4339,37 +4550,97 @@
                   <a:srgbClr val="22282E"/>
                 </a:solidFill>
               </a:rPr>
-              <a:t>•  sudo apt install -y binutils file</a:t>
-            </a:r>
-          </a:p>
-          <a:p>
-            <a:pPr>
-              <a:spcAft>
-                <a:spcPts val="600"/>
-              </a:spcAft>
-            </a:pPr>
-            <a:r>
-              <a:rPr sz="1500">
-                <a:solidFill>
-                  <a:srgbClr val="22282E"/>
-                </a:solidFill>
-              </a:rPr>
-              <a:t>•  pip install pwntools    # checksec</a:t>
-            </a:r>
-          </a:p>
-          <a:p>
-            <a:pPr>
-              <a:spcAft>
-                <a:spcPts val="600"/>
-              </a:spcAft>
-            </a:pPr>
-            <a:r>
-              <a:rPr sz="1500">
-                <a:solidFill>
-                  <a:srgbClr val="22282E"/>
-                </a:solidFill>
-              </a:rPr>
-              <a:t>•  sudo apt install -y pev</a:t>
+              <a:t>•  Ingeniería inversa: proceso de deducir el funcionamiento de un programa a partir de su forma</a:t>
+            </a:r>
+          </a:p>
+          <a:p>
+            <a:pPr>
+              <a:spcAft>
+                <a:spcPts val="600"/>
+              </a:spcAft>
+            </a:pPr>
+            <a:r>
+              <a:rPr sz="1500">
+                <a:solidFill>
+                  <a:srgbClr val="22282E"/>
+                </a:solidFill>
+              </a:rPr>
+              <a:t>•  compilada. Clave: legal y valiosa en seguridad defensiva y ofensiva autorizada.</a:t>
+            </a:r>
+          </a:p>
+          <a:p>
+            <a:pPr>
+              <a:spcAft>
+                <a:spcPts val="600"/>
+              </a:spcAft>
+            </a:pPr>
+            <a:r>
+              <a:rPr sz="1500">
+                <a:solidFill>
+                  <a:srgbClr val="22282E"/>
+                </a:solidFill>
+              </a:rPr>
+              <a:t>•  ELF: formato ejecutable de Linux con cabecera, program headers (carga) y section headers</a:t>
+            </a:r>
+          </a:p>
+          <a:p>
+            <a:pPr>
+              <a:spcAft>
+                <a:spcPts val="600"/>
+              </a:spcAft>
+            </a:pPr>
+            <a:r>
+              <a:rPr sz="1500">
+                <a:solidFill>
+                  <a:srgbClr val="22282E"/>
+                </a:solidFill>
+              </a:rPr>
+              <a:t>•  (análisis). Clave: readelf -h muestra tipo, arquitectura y entry point.</a:t>
+            </a:r>
+          </a:p>
+          <a:p>
+            <a:pPr>
+              <a:spcAft>
+                <a:spcPts val="600"/>
+              </a:spcAft>
+            </a:pPr>
+            <a:r>
+              <a:rPr sz="1500">
+                <a:solidFill>
+                  <a:srgbClr val="22282E"/>
+                </a:solidFill>
+              </a:rPr>
+              <a:t>•  PE: formato de Windows (DOS header, PE header, secciones, tabla de importaciones). Clave: las</a:t>
+            </a:r>
+          </a:p>
+          <a:p>
+            <a:pPr>
+              <a:spcAft>
+                <a:spcPts val="600"/>
+              </a:spcAft>
+            </a:pPr>
+            <a:r>
+              <a:rPr sz="1500">
+                <a:solidFill>
+                  <a:srgbClr val="22282E"/>
+                </a:solidFill>
+              </a:rPr>
+              <a:t>•  imports revelan qué APIs usa (indicio de comportamiento).</a:t>
+            </a:r>
+          </a:p>
+          <a:p>
+            <a:pPr>
+              <a:spcAft>
+                <a:spcPts val="600"/>
+              </a:spcAft>
+            </a:pPr>
+            <a:r>
+              <a:rPr sz="1500">
+                <a:solidFill>
+                  <a:srgbClr val="22282E"/>
+                </a:solidFill>
+              </a:rPr>
+              <a:t>•  Binario stripped: sin símbolos de depuración/nombres. Clave: dificulta el análisis; hay que</a:t>
             </a:r>
           </a:p>
         </p:txBody>
@@ -4420,7 +4691,7 @@
                   <a:srgbClr val="0B3D2E"/>
                 </a:solidFill>
               </a:rPr>
-              <a:t>🧪 Laboratorio guiado</a:t>
+              <a:t>📔 Glosario</a:t>
             </a:r>
           </a:p>
         </p:txBody>
@@ -4458,97 +4729,97 @@
                   <a:srgbClr val="22282E"/>
                 </a:solidFill>
               </a:rPr>
-              <a:t>•  Compila o toma un binario de práctica (crackme) y haz el triage:</a:t>
-            </a:r>
-          </a:p>
-          <a:p>
-            <a:pPr>
-              <a:spcAft>
-                <a:spcPts val="600"/>
-              </a:spcAft>
-            </a:pPr>
-            <a:r>
-              <a:rPr sz="1500">
-                <a:solidFill>
-                  <a:srgbClr val="22282E"/>
-                </a:solidFill>
-              </a:rPr>
-              <a:t>•  file crackme</a:t>
-            </a:r>
-          </a:p>
-          <a:p>
-            <a:pPr>
-              <a:spcAft>
-                <a:spcPts val="600"/>
-              </a:spcAft>
-            </a:pPr>
-            <a:r>
-              <a:rPr sz="1500">
-                <a:solidFill>
-                  <a:srgbClr val="22282E"/>
-                </a:solidFill>
-              </a:rPr>
-              <a:t>•  checksec --file=crackme</a:t>
-            </a:r>
-          </a:p>
-          <a:p>
-            <a:pPr>
-              <a:spcAft>
-                <a:spcPts val="600"/>
-              </a:spcAft>
-            </a:pPr>
-            <a:r>
-              <a:rPr sz="1500">
-                <a:solidFill>
-                  <a:srgbClr val="22282E"/>
-                </a:solidFill>
-              </a:rPr>
-              <a:t>•  strings -n 6 crackme | less     # busca prompts, rutas, contraseñas, formatos</a:t>
-            </a:r>
-          </a:p>
-          <a:p>
-            <a:pPr>
-              <a:spcAft>
-                <a:spcPts val="600"/>
-              </a:spcAft>
-            </a:pPr>
-            <a:r>
-              <a:rPr sz="1500">
-                <a:solidFill>
-                  <a:srgbClr val="22282E"/>
-                </a:solidFill>
-              </a:rPr>
-              <a:t>•  Explora la estructura ELF:</a:t>
-            </a:r>
-          </a:p>
-          <a:p>
-            <a:pPr>
-              <a:spcAft>
-                <a:spcPts val="600"/>
-              </a:spcAft>
-            </a:pPr>
-            <a:r>
-              <a:rPr sz="1500">
-                <a:solidFill>
-                  <a:srgbClr val="22282E"/>
-                </a:solidFill>
-              </a:rPr>
-              <a:t>•  readelf -h crackme            # cabecera, entry point</a:t>
-            </a:r>
-          </a:p>
-          <a:p>
-            <a:pPr>
-              <a:spcAft>
-                <a:spcPts val="600"/>
-              </a:spcAft>
-            </a:pPr>
-            <a:r>
-              <a:rPr sz="1500">
-                <a:solidFill>
-                  <a:srgbClr val="22282E"/>
-                </a:solidFill>
-              </a:rPr>
-              <a:t>•  readelf -S crackme            # secciones</a:t>
+              <a:t>•  Término — Definición concisa</a:t>
+            </a:r>
+          </a:p>
+          <a:p>
+            <a:pPr>
+              <a:spcAft>
+                <a:spcPts val="600"/>
+              </a:spcAft>
+            </a:pPr>
+            <a:r>
+              <a:rPr sz="1500">
+                <a:solidFill>
+                  <a:srgbClr val="22282E"/>
+                </a:solidFill>
+              </a:rPr>
+              <a:t>•  Ingeniería inversa — Entender un programa desde su forma compilada</a:t>
+            </a:r>
+          </a:p>
+          <a:p>
+            <a:pPr>
+              <a:spcAft>
+                <a:spcPts val="600"/>
+              </a:spcAft>
+            </a:pPr>
+            <a:r>
+              <a:rPr sz="1500">
+                <a:solidFill>
+                  <a:srgbClr val="22282E"/>
+                </a:solidFill>
+              </a:rPr>
+              <a:t>•  Usos legítimos — Análisis de malware, RE de vulnerabilidades, forense</a:t>
+            </a:r>
+          </a:p>
+          <a:p>
+            <a:pPr>
+              <a:spcAft>
+                <a:spcPts val="600"/>
+              </a:spcAft>
+            </a:pPr>
+            <a:r>
+              <a:rPr sz="1500">
+                <a:solidFill>
+                  <a:srgbClr val="22282E"/>
+                </a:solidFill>
+              </a:rPr>
+              <a:t>•  ELF — Formato de ejecutable de Linux</a:t>
+            </a:r>
+          </a:p>
+          <a:p>
+            <a:pPr>
+              <a:spcAft>
+                <a:spcPts val="600"/>
+              </a:spcAft>
+            </a:pPr>
+            <a:r>
+              <a:rPr sz="1500">
+                <a:solidFill>
+                  <a:srgbClr val="22282E"/>
+                </a:solidFill>
+              </a:rPr>
+              <a:t>•  PE — Formato de ejecutable de Windows</a:t>
+            </a:r>
+          </a:p>
+          <a:p>
+            <a:pPr>
+              <a:spcAft>
+                <a:spcPts val="600"/>
+              </a:spcAft>
+            </a:pPr>
+            <a:r>
+              <a:rPr sz="1500">
+                <a:solidFill>
+                  <a:srgbClr val="22282E"/>
+                </a:solidFill>
+              </a:rPr>
+              <a:t>•  Sección — Parte del binario con un propósito (.text, .rodata…)</a:t>
+            </a:r>
+          </a:p>
+          <a:p>
+            <a:pPr>
+              <a:spcAft>
+                <a:spcPts val="600"/>
+              </a:spcAft>
+            </a:pPr>
+            <a:r>
+              <a:rPr sz="1500">
+                <a:solidFill>
+                  <a:srgbClr val="22282E"/>
+                </a:solidFill>
+              </a:rPr>
+              <a:t>•  .text / .rodata / .data — Código / cadenas y constantes / datos inicializados</a:t>
             </a:r>
           </a:p>
         </p:txBody>
@@ -4599,7 +4870,7 @@
                   <a:srgbClr val="0B3D2E"/>
                 </a:solidFill>
               </a:rPr>
-              <a:t>✍️ Ejercicios</a:t>
+              <a:t>🧪 Laboratorio guiado</a:t>
             </a:r>
           </a:p>
         </p:txBody>
@@ -4637,82 +4908,97 @@
                   <a:srgbClr val="22282E"/>
                 </a:solidFill>
               </a:rPr>
-              <a:t>•  Diferencia entre program headers y section headers de un ELF.</a:t>
-            </a:r>
-          </a:p>
-          <a:p>
-            <a:pPr>
-              <a:spcAft>
-                <a:spcPts val="600"/>
-              </a:spcAft>
-            </a:pPr>
-            <a:r>
-              <a:rPr sz="1500">
-                <a:solidFill>
-                  <a:srgbClr val="22282E"/>
-                </a:solidFill>
-              </a:rPr>
-              <a:t>•  Extrae el entry point con readelf y localízalo en el desensamblado.</a:t>
-            </a:r>
-          </a:p>
-          <a:p>
-            <a:pPr>
-              <a:spcAft>
-                <a:spcPts val="600"/>
-              </a:spcAft>
-            </a:pPr>
-            <a:r>
-              <a:rPr sz="1500">
-                <a:solidFill>
-                  <a:srgbClr val="22282E"/>
-                </a:solidFill>
-              </a:rPr>
-              <a:t>•  Encuentra una cadena sospechosa con strings y razona su función.</a:t>
-            </a:r>
-          </a:p>
-          <a:p>
-            <a:pPr>
-              <a:spcAft>
-                <a:spcPts val="600"/>
-              </a:spcAft>
-            </a:pPr>
-            <a:r>
-              <a:rPr sz="1500">
-                <a:solidFill>
-                  <a:srgbClr val="22282E"/>
-                </a:solidFill>
-              </a:rPr>
-              <a:t>•  Determina si un binario está stripped y cómo lo sabes.</a:t>
-            </a:r>
-          </a:p>
-          <a:p>
-            <a:pPr>
-              <a:spcAft>
-                <a:spcPts val="600"/>
-              </a:spcAft>
-            </a:pPr>
-            <a:r>
-              <a:rPr sz="1500">
-                <a:solidFill>
-                  <a:srgbClr val="22282E"/>
-                </a:solidFill>
-              </a:rPr>
-              <a:t>•  Lista tres APIs de Windows en un PE y deduce comportamiento.</a:t>
-            </a:r>
-          </a:p>
-          <a:p>
-            <a:pPr>
-              <a:spcAft>
-                <a:spcPts val="600"/>
-              </a:spcAft>
-            </a:pPr>
-            <a:r>
-              <a:rPr sz="1500">
-                <a:solidFill>
-                  <a:srgbClr val="22282E"/>
-                </a:solidFill>
-              </a:rPr>
-              <a:t>•  Propón una metodología de reversing para un binario de 2 MB.</a:t>
+              <a:t>•  Compila o toma un binario de práctica (crackme) y haz el triage:</a:t>
+            </a:r>
+          </a:p>
+          <a:p>
+            <a:pPr>
+              <a:spcAft>
+                <a:spcPts val="600"/>
+              </a:spcAft>
+            </a:pPr>
+            <a:r>
+              <a:rPr sz="1500">
+                <a:solidFill>
+                  <a:srgbClr val="22282E"/>
+                </a:solidFill>
+              </a:rPr>
+              <a:t>•  Explora la estructura ELF:</a:t>
+            </a:r>
+          </a:p>
+          <a:p>
+            <a:pPr>
+              <a:spcAft>
+                <a:spcPts val="600"/>
+              </a:spcAft>
+            </a:pPr>
+            <a:r>
+              <a:rPr sz="1500">
+                <a:solidFill>
+                  <a:srgbClr val="22282E"/>
+                </a:solidFill>
+              </a:rPr>
+              <a:t>•  Localiza la función main y desensámblala superficialmente:</a:t>
+            </a:r>
+          </a:p>
+          <a:p>
+            <a:pPr>
+              <a:spcAft>
+                <a:spcPts val="600"/>
+              </a:spcAft>
+            </a:pPr>
+            <a:r>
+              <a:rPr sz="1500">
+                <a:solidFill>
+                  <a:srgbClr val="22282E"/>
+                </a:solidFill>
+              </a:rPr>
+              <a:t>•  Identifica llamadas relevantes (strcmp, puts, scanf) que sugieran la lógica de validación.</a:t>
+            </a:r>
+          </a:p>
+          <a:p>
+            <a:pPr>
+              <a:spcAft>
+                <a:spcPts val="600"/>
+              </a:spcAft>
+            </a:pPr>
+            <a:r>
+              <a:rPr sz="1500">
+                <a:solidFill>
+                  <a:srgbClr val="22282E"/>
+                </a:solidFill>
+              </a:rPr>
+              <a:t>•  Para un PE (si dispones de uno de práctica), usa pev/peframe para listar imports y secciones:</a:t>
+            </a:r>
+          </a:p>
+          <a:p>
+            <a:pPr>
+              <a:spcAft>
+                <a:spcPts val="600"/>
+              </a:spcAft>
+            </a:pPr>
+            <a:r>
+              <a:rPr sz="1500">
+                <a:solidFill>
+                  <a:srgbClr val="22282E"/>
+                </a:solidFill>
+              </a:rPr>
+              <a:t>•  Escribe un mini-informe: propósito aparente, funciones clave y por dónde continuarías (estático con</a:t>
+            </a:r>
+          </a:p>
+          <a:p>
+            <a:pPr>
+              <a:spcAft>
+                <a:spcPts val="600"/>
+              </a:spcAft>
+            </a:pPr>
+            <a:r>
+              <a:rPr sz="1500">
+                <a:solidFill>
+                  <a:srgbClr val="22282E"/>
+                </a:solidFill>
+              </a:rPr>
+              <a:t>•  Ghidra o dinámico con GDB).</a:t>
             </a:r>
           </a:p>
         </p:txBody>
@@ -4763,7 +5049,7 @@
                   <a:srgbClr val="0B3D2E"/>
                 </a:solidFill>
               </a:rPr>
-              <a:t>📝 Reto verificable</a:t>
+              <a:t>✍️ Ejercicios</a:t>
             </a:r>
           </a:p>
         </p:txBody>
@@ -4801,52 +5087,82 @@
                   <a:srgbClr val="22282E"/>
                 </a:solidFill>
               </a:rPr>
-              <a:t>•  Realiza el triage estático completo de un crackme e identifica, sin ejecutarlo, cuál es la función</a:t>
-            </a:r>
-          </a:p>
-          <a:p>
-            <a:pPr>
-              <a:spcAft>
-                <a:spcPts val="600"/>
-              </a:spcAft>
-            </a:pPr>
-            <a:r>
-              <a:rPr sz="1500">
-                <a:solidFill>
-                  <a:srgbClr val="22282E"/>
-                </a:solidFill>
-              </a:rPr>
-              <a:t>•  que compara la clave y qué API/rutina usa.</a:t>
-            </a:r>
-          </a:p>
-          <a:p>
-            <a:pPr>
-              <a:spcAft>
-                <a:spcPts val="600"/>
-              </a:spcAft>
-            </a:pPr>
-            <a:r>
-              <a:rPr sz="1500">
-                <a:solidFill>
-                  <a:srgbClr val="22282E"/>
-                </a:solidFill>
-              </a:rPr>
-              <a:t>•  Criterio de aceptación: señalas la función de comparación (p. ej. strcmp/lógica propia) y</a:t>
-            </a:r>
-          </a:p>
-          <a:p>
-            <a:pPr>
-              <a:spcAft>
-                <a:spcPts val="600"/>
-              </a:spcAft>
-            </a:pPr>
-            <a:r>
-              <a:rPr sz="1500">
-                <a:solidFill>
-                  <a:srgbClr val="22282E"/>
-                </a:solidFill>
-              </a:rPr>
-              <a:t>•  justificas tu conclusión con evidencia de strings/objdump/readelf.</a:t>
+              <a:t>•  Diferencia entre program headers y section headers de un ELF.</a:t>
+            </a:r>
+          </a:p>
+          <a:p>
+            <a:pPr>
+              <a:spcAft>
+                <a:spcPts val="600"/>
+              </a:spcAft>
+            </a:pPr>
+            <a:r>
+              <a:rPr sz="1500">
+                <a:solidFill>
+                  <a:srgbClr val="22282E"/>
+                </a:solidFill>
+              </a:rPr>
+              <a:t>•  Extrae el entry point con readelf y localízalo en el desensamblado.</a:t>
+            </a:r>
+          </a:p>
+          <a:p>
+            <a:pPr>
+              <a:spcAft>
+                <a:spcPts val="600"/>
+              </a:spcAft>
+            </a:pPr>
+            <a:r>
+              <a:rPr sz="1500">
+                <a:solidFill>
+                  <a:srgbClr val="22282E"/>
+                </a:solidFill>
+              </a:rPr>
+              <a:t>•  Encuentra una cadena sospechosa con strings y razona su función.</a:t>
+            </a:r>
+          </a:p>
+          <a:p>
+            <a:pPr>
+              <a:spcAft>
+                <a:spcPts val="600"/>
+              </a:spcAft>
+            </a:pPr>
+            <a:r>
+              <a:rPr sz="1500">
+                <a:solidFill>
+                  <a:srgbClr val="22282E"/>
+                </a:solidFill>
+              </a:rPr>
+              <a:t>•  Determina si un binario está stripped y cómo lo sabes.</a:t>
+            </a:r>
+          </a:p>
+          <a:p>
+            <a:pPr>
+              <a:spcAft>
+                <a:spcPts val="600"/>
+              </a:spcAft>
+            </a:pPr>
+            <a:r>
+              <a:rPr sz="1500">
+                <a:solidFill>
+                  <a:srgbClr val="22282E"/>
+                </a:solidFill>
+              </a:rPr>
+              <a:t>•  Lista tres APIs de Windows en un PE y deduce comportamiento.</a:t>
+            </a:r>
+          </a:p>
+          <a:p>
+            <a:pPr>
+              <a:spcAft>
+                <a:spcPts val="600"/>
+              </a:spcAft>
+            </a:pPr>
+            <a:r>
+              <a:rPr sz="1500">
+                <a:solidFill>
+                  <a:srgbClr val="22282E"/>
+                </a:solidFill>
+              </a:rPr>
+              <a:t>•  Propón una metodología de reversing para un binario de 2 MB.</a:t>
             </a:r>
           </a:p>
         </p:txBody>
